--- a/Project/Prezentacija.pptx
+++ b/Project/Prezentacija.pptx
@@ -5,7 +5,7 @@
     <p:sldMasterId id="2147483660" r:id="rId1"/>
   </p:sldMasterIdLst>
   <p:notesMasterIdLst>
-    <p:notesMasterId r:id="rId42"/>
+    <p:notesMasterId r:id="rId52"/>
   </p:notesMasterIdLst>
   <p:sldIdLst>
     <p:sldId id="256" r:id="rId2"/>
@@ -48,6 +48,16 @@
     <p:sldId id="287" r:id="rId39"/>
     <p:sldId id="290" r:id="rId40"/>
     <p:sldId id="291" r:id="rId41"/>
+    <p:sldId id="296" r:id="rId42"/>
+    <p:sldId id="297" r:id="rId43"/>
+    <p:sldId id="298" r:id="rId44"/>
+    <p:sldId id="299" r:id="rId45"/>
+    <p:sldId id="301" r:id="rId46"/>
+    <p:sldId id="300" r:id="rId47"/>
+    <p:sldId id="302" r:id="rId48"/>
+    <p:sldId id="303" r:id="rId49"/>
+    <p:sldId id="304" r:id="rId50"/>
+    <p:sldId id="305" r:id="rId51"/>
   </p:sldIdLst>
   <p:sldSz cx="12192000" cy="6858000"/>
   <p:notesSz cx="6858000" cy="9144000"/>
@@ -146,6 +156,11 @@
       </a:defRPr>
     </a:lvl9pPr>
   </p:defaultTextStyle>
+  <p:extLst>
+    <p:ext uri="{EFAFB233-063F-42B5-8137-9DF3F51BA10A}">
+      <p15:sldGuideLst xmlns:p15="http://schemas.microsoft.com/office/powerpoint/2012/main"/>
+    </p:ext>
+  </p:extLst>
 </p:presentation>
 </file>
 
@@ -231,7 +246,7 @@
           <a:p>
             <a:fld id="{3BC07179-6466-48FF-BFE6-F96C8026954B}" type="datetimeFigureOut">
               <a:rPr lang="en-US" smtClean="0"/>
-              <a:t>3/27/2026</a:t>
+              <a:t>3/30/2026</a:t>
             </a:fld>
             <a:endParaRPr lang="en-US"/>
           </a:p>
@@ -767,7 +782,7 @@
           <a:p>
             <a:fld id="{9257E61E-B6C9-4F8D-A749-38ADC6F6D6FB}" type="datetimeFigureOut">
               <a:rPr lang="en-US" smtClean="0"/>
-              <a:t>3/26/2026</a:t>
+              <a:t>3/30/2026</a:t>
             </a:fld>
             <a:endParaRPr lang="en-US"/>
           </a:p>
@@ -1065,7 +1080,7 @@
           <a:p>
             <a:fld id="{9257E61E-B6C9-4F8D-A749-38ADC6F6D6FB}" type="datetimeFigureOut">
               <a:rPr lang="en-US" smtClean="0"/>
-              <a:t>3/26/2026</a:t>
+              <a:t>3/30/2026</a:t>
             </a:fld>
             <a:endParaRPr lang="en-US"/>
           </a:p>
@@ -1257,7 +1272,7 @@
           <a:p>
             <a:fld id="{9257E61E-B6C9-4F8D-A749-38ADC6F6D6FB}" type="datetimeFigureOut">
               <a:rPr lang="en-US" smtClean="0"/>
-              <a:t>3/26/2026</a:t>
+              <a:t>3/30/2026</a:t>
             </a:fld>
             <a:endParaRPr lang="en-US"/>
           </a:p>
@@ -1518,7 +1533,7 @@
           <a:p>
             <a:fld id="{9257E61E-B6C9-4F8D-A749-38ADC6F6D6FB}" type="datetimeFigureOut">
               <a:rPr lang="en-US" smtClean="0"/>
-              <a:t>3/26/2026</a:t>
+              <a:t>3/30/2026</a:t>
             </a:fld>
             <a:endParaRPr lang="en-US"/>
           </a:p>
@@ -1942,7 +1957,7 @@
           <a:p>
             <a:fld id="{9257E61E-B6C9-4F8D-A749-38ADC6F6D6FB}" type="datetimeFigureOut">
               <a:rPr lang="en-US" smtClean="0"/>
-              <a:t>3/26/2026</a:t>
+              <a:t>3/30/2026</a:t>
             </a:fld>
             <a:endParaRPr lang="en-US"/>
           </a:p>
@@ -2479,7 +2494,7 @@
           <a:p>
             <a:fld id="{9257E61E-B6C9-4F8D-A749-38ADC6F6D6FB}" type="datetimeFigureOut">
               <a:rPr lang="en-US" smtClean="0"/>
-              <a:t>3/26/2026</a:t>
+              <a:t>3/30/2026</a:t>
             </a:fld>
             <a:endParaRPr lang="en-US"/>
           </a:p>
@@ -3343,7 +3358,7 @@
           <a:p>
             <a:fld id="{9257E61E-B6C9-4F8D-A749-38ADC6F6D6FB}" type="datetimeFigureOut">
               <a:rPr lang="en-US" smtClean="0"/>
-              <a:t>3/26/2026</a:t>
+              <a:t>3/30/2026</a:t>
             </a:fld>
             <a:endParaRPr lang="en-US"/>
           </a:p>
@@ -3513,7 +3528,7 @@
           <a:p>
             <a:fld id="{9257E61E-B6C9-4F8D-A749-38ADC6F6D6FB}" type="datetimeFigureOut">
               <a:rPr lang="en-US" smtClean="0"/>
-              <a:t>3/26/2026</a:t>
+              <a:t>3/30/2026</a:t>
             </a:fld>
             <a:endParaRPr lang="en-US"/>
           </a:p>
@@ -3697,7 +3712,7 @@
           <a:p>
             <a:fld id="{9257E61E-B6C9-4F8D-A749-38ADC6F6D6FB}" type="datetimeFigureOut">
               <a:rPr lang="en-US" smtClean="0"/>
-              <a:t>3/26/2026</a:t>
+              <a:t>3/30/2026</a:t>
             </a:fld>
             <a:endParaRPr lang="en-US"/>
           </a:p>
@@ -3867,7 +3882,7 @@
           <a:p>
             <a:fld id="{9257E61E-B6C9-4F8D-A749-38ADC6F6D6FB}" type="datetimeFigureOut">
               <a:rPr lang="en-US" smtClean="0"/>
-              <a:t>3/26/2026</a:t>
+              <a:t>3/30/2026</a:t>
             </a:fld>
             <a:endParaRPr lang="en-US"/>
           </a:p>
@@ -4111,7 +4126,7 @@
           <a:p>
             <a:fld id="{9257E61E-B6C9-4F8D-A749-38ADC6F6D6FB}" type="datetimeFigureOut">
               <a:rPr lang="en-US" smtClean="0"/>
-              <a:t>3/26/2026</a:t>
+              <a:t>3/30/2026</a:t>
             </a:fld>
             <a:endParaRPr lang="en-US"/>
           </a:p>
@@ -4347,7 +4362,7 @@
           <a:p>
             <a:fld id="{9257E61E-B6C9-4F8D-A749-38ADC6F6D6FB}" type="datetimeFigureOut">
               <a:rPr lang="en-US" smtClean="0"/>
-              <a:t>3/26/2026</a:t>
+              <a:t>3/30/2026</a:t>
             </a:fld>
             <a:endParaRPr lang="en-US"/>
           </a:p>
@@ -4813,7 +4828,7 @@
           <a:p>
             <a:fld id="{9257E61E-B6C9-4F8D-A749-38ADC6F6D6FB}" type="datetimeFigureOut">
               <a:rPr lang="en-US" smtClean="0"/>
-              <a:t>3/26/2026</a:t>
+              <a:t>3/30/2026</a:t>
             </a:fld>
             <a:endParaRPr lang="en-US"/>
           </a:p>
@@ -4931,7 +4946,7 @@
           <a:p>
             <a:fld id="{9257E61E-B6C9-4F8D-A749-38ADC6F6D6FB}" type="datetimeFigureOut">
               <a:rPr lang="en-US" smtClean="0"/>
-              <a:t>3/26/2026</a:t>
+              <a:t>3/30/2026</a:t>
             </a:fld>
             <a:endParaRPr lang="en-US"/>
           </a:p>
@@ -5026,7 +5041,7 @@
           <a:p>
             <a:fld id="{9257E61E-B6C9-4F8D-A749-38ADC6F6D6FB}" type="datetimeFigureOut">
               <a:rPr lang="en-US" smtClean="0"/>
-              <a:t>3/26/2026</a:t>
+              <a:t>3/30/2026</a:t>
             </a:fld>
             <a:endParaRPr lang="en-US"/>
           </a:p>
@@ -5281,7 +5296,7 @@
           <a:p>
             <a:fld id="{9257E61E-B6C9-4F8D-A749-38ADC6F6D6FB}" type="datetimeFigureOut">
               <a:rPr lang="en-US" smtClean="0"/>
-              <a:t>3/26/2026</a:t>
+              <a:t>3/30/2026</a:t>
             </a:fld>
             <a:endParaRPr lang="en-US"/>
           </a:p>
@@ -5581,7 +5596,7 @@
           <a:p>
             <a:fld id="{9257E61E-B6C9-4F8D-A749-38ADC6F6D6FB}" type="datetimeFigureOut">
               <a:rPr lang="en-US" smtClean="0"/>
-              <a:t>3/26/2026</a:t>
+              <a:t>3/30/2026</a:t>
             </a:fld>
             <a:endParaRPr lang="en-US"/>
           </a:p>
@@ -5815,7 +5830,7 @@
           <a:p>
             <a:fld id="{9257E61E-B6C9-4F8D-A749-38ADC6F6D6FB}" type="datetimeFigureOut">
               <a:rPr lang="en-US" smtClean="0"/>
-              <a:t>3/26/2026</a:t>
+              <a:t>3/30/2026</a:t>
             </a:fld>
             <a:endParaRPr lang="en-US"/>
           </a:p>
@@ -23832,7 +23847,7 @@
         </p:blipFill>
         <p:spPr>
           <a:xfrm>
-            <a:off x="0" y="-307079"/>
+            <a:off x="0" y="-542122"/>
             <a:ext cx="12192000" cy="2154547"/>
           </a:xfrm>
           <a:prstGeom prst="rect">
@@ -23862,7 +23877,7 @@
         </p:blipFill>
         <p:spPr>
           <a:xfrm>
-            <a:off x="0" y="1665088"/>
+            <a:off x="0" y="1414911"/>
             <a:ext cx="12192000" cy="2049220"/>
           </a:xfrm>
           <a:prstGeom prst="rect">
@@ -23892,7 +23907,7 @@
         </p:blipFill>
         <p:spPr>
           <a:xfrm>
-            <a:off x="0" y="3714308"/>
+            <a:off x="0" y="3464131"/>
             <a:ext cx="12192000" cy="1762699"/>
           </a:xfrm>
           <a:prstGeom prst="rect">
@@ -23922,7 +23937,7 @@
         </p:blipFill>
         <p:spPr>
           <a:xfrm>
-            <a:off x="0" y="5340646"/>
+            <a:off x="0" y="5089634"/>
             <a:ext cx="12192000" cy="1702017"/>
           </a:xfrm>
           <a:prstGeom prst="rect">
@@ -23982,7 +23997,7 @@
         </p:blipFill>
         <p:spPr>
           <a:xfrm>
-            <a:off x="0" y="0"/>
+            <a:off x="0" y="-313464"/>
             <a:ext cx="12192000" cy="2192496"/>
           </a:xfrm>
           <a:prstGeom prst="rect">
@@ -24012,7 +24027,7 @@
         </p:blipFill>
         <p:spPr>
           <a:xfrm>
-            <a:off x="0" y="2001871"/>
+            <a:off x="0" y="1658225"/>
             <a:ext cx="12192000" cy="2095500"/>
           </a:xfrm>
           <a:prstGeom prst="rect">
@@ -24042,7 +24057,7 @@
         </p:blipFill>
         <p:spPr>
           <a:xfrm>
-            <a:off x="0" y="3948689"/>
+            <a:off x="0" y="3429000"/>
             <a:ext cx="12192000" cy="1664910"/>
           </a:xfrm>
           <a:prstGeom prst="rect">
@@ -24072,7 +24087,7 @@
         </p:blipFill>
         <p:spPr>
           <a:xfrm>
-            <a:off x="0" y="5613599"/>
+            <a:off x="0" y="5093910"/>
             <a:ext cx="12192000" cy="1653886"/>
           </a:xfrm>
           <a:prstGeom prst="rect">
@@ -24236,21 +24251,98 @@
             <p:ph type="title"/>
           </p:nvPr>
         </p:nvSpPr>
-        <p:spPr/>
+        <p:spPr>
+          <a:xfrm>
+            <a:off x="913795" y="96350"/>
+            <a:ext cx="10353762" cy="970450"/>
+          </a:xfrm>
+        </p:spPr>
         <p:txBody>
           <a:bodyPr/>
           <a:lstStyle/>
           <a:p>
-            <a:endParaRPr lang="en-US"/>
+            <a:r>
+              <a:rPr lang="en-US" dirty="0" err="1"/>
+              <a:t>Korisnikov</a:t>
+            </a:r>
+            <a:r>
+              <a:rPr lang="en-US" dirty="0"/>
+              <a:t> </a:t>
+            </a:r>
+            <a:r>
+              <a:rPr lang="en-US" dirty="0" err="1"/>
+              <a:t>slučaj</a:t>
+            </a:r>
+            <a:endParaRPr lang="en-US" dirty="0"/>
           </a:p>
         </p:txBody>
       </p:sp>
+      <p:pic>
+        <p:nvPicPr>
+          <p:cNvPr id="6" name="Picture 5">
+            <a:extLst>
+              <a:ext uri="{FF2B5EF4-FFF2-40B4-BE49-F238E27FC236}">
+                <a16:creationId xmlns:a16="http://schemas.microsoft.com/office/drawing/2014/main" id="{83030F64-2DF5-4011-981B-8505BE977674}"/>
+              </a:ext>
+            </a:extLst>
+          </p:cNvPr>
+          <p:cNvPicPr>
+            <a:picLocks noChangeAspect="1"/>
+          </p:cNvPicPr>
+          <p:nvPr/>
+        </p:nvPicPr>
+        <p:blipFill>
+          <a:blip r:embed="rId2"/>
+          <a:stretch>
+            <a:fillRect/>
+          </a:stretch>
+        </p:blipFill>
+        <p:spPr>
+          <a:xfrm>
+            <a:off x="0" y="1066800"/>
+            <a:ext cx="12187190" cy="4778188"/>
+          </a:xfrm>
+          <a:prstGeom prst="rect">
+            <a:avLst/>
+          </a:prstGeom>
+        </p:spPr>
+      </p:pic>
+    </p:spTree>
+    <p:extLst>
+      <p:ext uri="{BB962C8B-B14F-4D97-AF65-F5344CB8AC3E}">
+        <p14:creationId xmlns:p14="http://schemas.microsoft.com/office/powerpoint/2010/main" val="2313200857"/>
+      </p:ext>
+    </p:extLst>
+  </p:cSld>
+  <p:clrMapOvr>
+    <a:masterClrMapping/>
+  </p:clrMapOvr>
+</p:sld>
+</file>
+
+<file path=ppt/slides/slide41.xml><?xml version="1.0" encoding="utf-8"?>
+<p:sld xmlns:a="http://schemas.openxmlformats.org/drawingml/2006/main" xmlns:r="http://schemas.openxmlformats.org/officeDocument/2006/relationships" xmlns:p="http://schemas.openxmlformats.org/presentationml/2006/main">
+  <p:cSld>
+    <p:spTree>
+      <p:nvGrpSpPr>
+        <p:cNvPr id="1" name=""/>
+        <p:cNvGrpSpPr/>
+        <p:nvPr/>
+      </p:nvGrpSpPr>
+      <p:grpSpPr>
+        <a:xfrm>
+          <a:off x="0" y="0"/>
+          <a:ext cx="0" cy="0"/>
+          <a:chOff x="0" y="0"/>
+          <a:chExt cx="0" cy="0"/>
+        </a:xfrm>
+      </p:grpSpPr>
       <p:sp>
         <p:nvSpPr>
           <p:cNvPr id="3" name="Content Placeholder 2">
             <a:extLst>
               <a:ext uri="{FF2B5EF4-FFF2-40B4-BE49-F238E27FC236}">
-                <a16:creationId xmlns:a16="http://schemas.microsoft.com/office/drawing/2014/main" id="{6E877241-A212-E08C-A990-23A1C517FB0B}"/>
+                <a16:creationId xmlns:a16="http://schemas.microsoft.com/office/drawing/2014/main" id="{E66C28AF-FA86-49BD-968D-01DA8C597344}"/>
               </a:ext>
             </a:extLst>
           </p:cNvPr>
@@ -24270,10 +24362,1803 @@
           </a:p>
         </p:txBody>
       </p:sp>
+      <p:pic>
+        <p:nvPicPr>
+          <p:cNvPr id="5" name="Picture 4">
+            <a:extLst>
+              <a:ext uri="{FF2B5EF4-FFF2-40B4-BE49-F238E27FC236}">
+                <a16:creationId xmlns:a16="http://schemas.microsoft.com/office/drawing/2014/main" id="{65A6E96B-2FD5-414E-A26A-2E02A3F513DA}"/>
+              </a:ext>
+            </a:extLst>
+          </p:cNvPr>
+          <p:cNvPicPr>
+            <a:picLocks noChangeAspect="1"/>
+          </p:cNvPicPr>
+          <p:nvPr/>
+        </p:nvPicPr>
+        <p:blipFill>
+          <a:blip r:embed="rId2"/>
+          <a:stretch>
+            <a:fillRect/>
+          </a:stretch>
+        </p:blipFill>
+        <p:spPr>
+          <a:xfrm>
+            <a:off x="29807" y="1066800"/>
+            <a:ext cx="12132386" cy="5443300"/>
+          </a:xfrm>
+          <a:prstGeom prst="rect">
+            <a:avLst/>
+          </a:prstGeom>
+        </p:spPr>
+      </p:pic>
     </p:spTree>
     <p:extLst>
       <p:ext uri="{BB962C8B-B14F-4D97-AF65-F5344CB8AC3E}">
-        <p14:creationId xmlns:p14="http://schemas.microsoft.com/office/powerpoint/2010/main" val="2313200857"/>
+        <p14:creationId xmlns:p14="http://schemas.microsoft.com/office/powerpoint/2010/main" val="509192263"/>
+      </p:ext>
+    </p:extLst>
+  </p:cSld>
+  <p:clrMapOvr>
+    <a:masterClrMapping/>
+  </p:clrMapOvr>
+</p:sld>
+</file>
+
+<file path=ppt/slides/slide42.xml><?xml version="1.0" encoding="utf-8"?>
+<p:sld xmlns:a="http://schemas.openxmlformats.org/drawingml/2006/main" xmlns:r="http://schemas.openxmlformats.org/officeDocument/2006/relationships" xmlns:p="http://schemas.openxmlformats.org/presentationml/2006/main">
+  <p:cSld>
+    <p:spTree>
+      <p:nvGrpSpPr>
+        <p:cNvPr id="1" name=""/>
+        <p:cNvGrpSpPr/>
+        <p:nvPr/>
+      </p:nvGrpSpPr>
+      <p:grpSpPr>
+        <a:xfrm>
+          <a:off x="0" y="0"/>
+          <a:ext cx="0" cy="0"/>
+          <a:chOff x="0" y="0"/>
+          <a:chExt cx="0" cy="0"/>
+        </a:xfrm>
+      </p:grpSpPr>
+      <p:pic>
+        <p:nvPicPr>
+          <p:cNvPr id="5" name="Picture 4">
+            <a:extLst>
+              <a:ext uri="{FF2B5EF4-FFF2-40B4-BE49-F238E27FC236}">
+                <a16:creationId xmlns:a16="http://schemas.microsoft.com/office/drawing/2014/main" id="{04AD3607-D232-4B51-8112-44397355EAB0}"/>
+              </a:ext>
+            </a:extLst>
+          </p:cNvPr>
+          <p:cNvPicPr>
+            <a:picLocks noChangeAspect="1"/>
+          </p:cNvPicPr>
+          <p:nvPr/>
+        </p:nvPicPr>
+        <p:blipFill>
+          <a:blip r:embed="rId2"/>
+          <a:stretch>
+            <a:fillRect/>
+          </a:stretch>
+        </p:blipFill>
+        <p:spPr>
+          <a:xfrm>
+            <a:off x="-21267" y="878541"/>
+            <a:ext cx="12213267" cy="5369335"/>
+          </a:xfrm>
+          <a:prstGeom prst="rect">
+            <a:avLst/>
+          </a:prstGeom>
+        </p:spPr>
+      </p:pic>
+    </p:spTree>
+    <p:extLst>
+      <p:ext uri="{BB962C8B-B14F-4D97-AF65-F5344CB8AC3E}">
+        <p14:creationId xmlns:p14="http://schemas.microsoft.com/office/powerpoint/2010/main" val="3903503964"/>
+      </p:ext>
+    </p:extLst>
+  </p:cSld>
+  <p:clrMapOvr>
+    <a:masterClrMapping/>
+  </p:clrMapOvr>
+</p:sld>
+</file>
+
+<file path=ppt/slides/slide43.xml><?xml version="1.0" encoding="utf-8"?>
+<p:sld xmlns:a="http://schemas.openxmlformats.org/drawingml/2006/main" xmlns:r="http://schemas.openxmlformats.org/officeDocument/2006/relationships" xmlns:p="http://schemas.openxmlformats.org/presentationml/2006/main">
+  <p:cSld>
+    <p:spTree>
+      <p:nvGrpSpPr>
+        <p:cNvPr id="1" name=""/>
+        <p:cNvGrpSpPr/>
+        <p:nvPr/>
+      </p:nvGrpSpPr>
+      <p:grpSpPr>
+        <a:xfrm>
+          <a:off x="0" y="0"/>
+          <a:ext cx="0" cy="0"/>
+          <a:chOff x="0" y="0"/>
+          <a:chExt cx="0" cy="0"/>
+        </a:xfrm>
+      </p:grpSpPr>
+      <p:pic>
+        <p:nvPicPr>
+          <p:cNvPr id="7" name="Picture 6">
+            <a:extLst>
+              <a:ext uri="{FF2B5EF4-FFF2-40B4-BE49-F238E27FC236}">
+                <a16:creationId xmlns:a16="http://schemas.microsoft.com/office/drawing/2014/main" id="{12C16F95-9D88-46ED-AC58-25A1A71F73CA}"/>
+              </a:ext>
+            </a:extLst>
+          </p:cNvPr>
+          <p:cNvPicPr>
+            <a:picLocks noChangeAspect="1"/>
+          </p:cNvPicPr>
+          <p:nvPr/>
+        </p:nvPicPr>
+        <p:blipFill>
+          <a:blip r:embed="rId2"/>
+          <a:stretch>
+            <a:fillRect/>
+          </a:stretch>
+        </p:blipFill>
+        <p:spPr>
+          <a:xfrm>
+            <a:off x="0" y="459407"/>
+            <a:ext cx="12093062" cy="5269040"/>
+          </a:xfrm>
+          <a:prstGeom prst="rect">
+            <a:avLst/>
+          </a:prstGeom>
+        </p:spPr>
+      </p:pic>
+    </p:spTree>
+    <p:extLst>
+      <p:ext uri="{BB962C8B-B14F-4D97-AF65-F5344CB8AC3E}">
+        <p14:creationId xmlns:p14="http://schemas.microsoft.com/office/powerpoint/2010/main" val="396480952"/>
+      </p:ext>
+    </p:extLst>
+  </p:cSld>
+  <p:clrMapOvr>
+    <a:masterClrMapping/>
+  </p:clrMapOvr>
+</p:sld>
+</file>
+
+<file path=ppt/slides/slide44.xml><?xml version="1.0" encoding="utf-8"?>
+<p:sld xmlns:a="http://schemas.openxmlformats.org/drawingml/2006/main" xmlns:r="http://schemas.openxmlformats.org/officeDocument/2006/relationships" xmlns:p="http://schemas.openxmlformats.org/presentationml/2006/main">
+  <p:cSld>
+    <p:spTree>
+      <p:nvGrpSpPr>
+        <p:cNvPr id="1" name=""/>
+        <p:cNvGrpSpPr/>
+        <p:nvPr/>
+      </p:nvGrpSpPr>
+      <p:grpSpPr>
+        <a:xfrm>
+          <a:off x="0" y="0"/>
+          <a:ext cx="0" cy="0"/>
+          <a:chOff x="0" y="0"/>
+          <a:chExt cx="0" cy="0"/>
+        </a:xfrm>
+      </p:grpSpPr>
+      <p:sp>
+        <p:nvSpPr>
+          <p:cNvPr id="3" name="Content Placeholder 2">
+            <a:extLst>
+              <a:ext uri="{FF2B5EF4-FFF2-40B4-BE49-F238E27FC236}">
+                <a16:creationId xmlns:a16="http://schemas.microsoft.com/office/drawing/2014/main" id="{F3536E74-5AB0-4A60-AAFB-5D279CDF1ACA}"/>
+              </a:ext>
+            </a:extLst>
+          </p:cNvPr>
+          <p:cNvSpPr>
+            <a:spLocks noGrp="1"/>
+          </p:cNvSpPr>
+          <p:nvPr>
+            <p:ph idx="1"/>
+          </p:nvPr>
+        </p:nvSpPr>
+        <p:spPr>
+          <a:xfrm>
+            <a:off x="89647" y="439270"/>
+            <a:ext cx="12192000" cy="1488141"/>
+          </a:xfrm>
+        </p:spPr>
+        <p:txBody>
+          <a:bodyPr/>
+          <a:lstStyle/>
+          <a:p>
+            <a:r>
+              <a:rPr lang="en-US" dirty="0" err="1"/>
+              <a:t>Nad</a:t>
+            </a:r>
+            <a:r>
+              <a:rPr lang="en-US" dirty="0"/>
+              <a:t> </a:t>
+            </a:r>
+            <a:r>
+              <a:rPr lang="en-US" dirty="0" err="1"/>
+              <a:t>unetim</a:t>
+            </a:r>
+            <a:r>
+              <a:rPr lang="en-US" dirty="0"/>
+              <a:t> </a:t>
+            </a:r>
+            <a:r>
+              <a:rPr lang="en-US" dirty="0" err="1"/>
+              <a:t>tekstom</a:t>
+            </a:r>
+            <a:r>
+              <a:rPr lang="en-US" dirty="0"/>
+              <a:t> </a:t>
+            </a:r>
+            <a:r>
+              <a:rPr lang="en-US" dirty="0" err="1"/>
+              <a:t>imamo</a:t>
+            </a:r>
+            <a:r>
+              <a:rPr lang="en-US" dirty="0"/>
+              <a:t> </a:t>
+            </a:r>
+            <a:r>
+              <a:rPr lang="en-US" dirty="0" err="1"/>
+              <a:t>više</a:t>
+            </a:r>
+            <a:r>
+              <a:rPr lang="en-US" dirty="0"/>
+              <a:t> </a:t>
+            </a:r>
+            <a:r>
+              <a:rPr lang="en-US" dirty="0" err="1"/>
+              <a:t>opcija</a:t>
+            </a:r>
+            <a:r>
+              <a:rPr lang="en-US" dirty="0"/>
+              <a:t> </a:t>
+            </a:r>
+            <a:r>
+              <a:rPr lang="en-US" dirty="0" err="1"/>
+              <a:t>koje</a:t>
+            </a:r>
+            <a:r>
+              <a:rPr lang="en-US" dirty="0"/>
+              <a:t> da </a:t>
+            </a:r>
+            <a:r>
+              <a:rPr lang="en-US" dirty="0" err="1"/>
+              <a:t>istražimo</a:t>
+            </a:r>
+            <a:r>
+              <a:rPr lang="en-US" dirty="0"/>
+              <a:t> </a:t>
+            </a:r>
+            <a:r>
+              <a:rPr lang="en-US" dirty="0" err="1"/>
+              <a:t>redom</a:t>
+            </a:r>
+            <a:endParaRPr lang="en-US" dirty="0"/>
+          </a:p>
+        </p:txBody>
+      </p:sp>
+      <p:pic>
+        <p:nvPicPr>
+          <p:cNvPr id="5" name="Picture 4">
+            <a:extLst>
+              <a:ext uri="{FF2B5EF4-FFF2-40B4-BE49-F238E27FC236}">
+                <a16:creationId xmlns:a16="http://schemas.microsoft.com/office/drawing/2014/main" id="{BFBC1175-9F83-416D-8DB0-BBC8C1D35D69}"/>
+              </a:ext>
+            </a:extLst>
+          </p:cNvPr>
+          <p:cNvPicPr>
+            <a:picLocks noChangeAspect="1"/>
+          </p:cNvPicPr>
+          <p:nvPr/>
+        </p:nvPicPr>
+        <p:blipFill>
+          <a:blip r:embed="rId2"/>
+          <a:stretch>
+            <a:fillRect/>
+          </a:stretch>
+        </p:blipFill>
+        <p:spPr>
+          <a:xfrm>
+            <a:off x="205034" y="1488141"/>
+            <a:ext cx="11781931" cy="5175751"/>
+          </a:xfrm>
+          <a:prstGeom prst="rect">
+            <a:avLst/>
+          </a:prstGeom>
+        </p:spPr>
+      </p:pic>
+    </p:spTree>
+    <p:extLst>
+      <p:ext uri="{BB962C8B-B14F-4D97-AF65-F5344CB8AC3E}">
+        <p14:creationId xmlns:p14="http://schemas.microsoft.com/office/powerpoint/2010/main" val="3344767338"/>
+      </p:ext>
+    </p:extLst>
+  </p:cSld>
+  <p:clrMapOvr>
+    <a:masterClrMapping/>
+  </p:clrMapOvr>
+</p:sld>
+</file>
+
+<file path=ppt/slides/slide45.xml><?xml version="1.0" encoding="utf-8"?>
+<p:sld xmlns:a="http://schemas.openxmlformats.org/drawingml/2006/main" xmlns:r="http://schemas.openxmlformats.org/officeDocument/2006/relationships" xmlns:p="http://schemas.openxmlformats.org/presentationml/2006/main">
+  <p:cSld>
+    <p:spTree>
+      <p:nvGrpSpPr>
+        <p:cNvPr id="1" name=""/>
+        <p:cNvGrpSpPr/>
+        <p:nvPr/>
+      </p:nvGrpSpPr>
+      <p:grpSpPr>
+        <a:xfrm>
+          <a:off x="0" y="0"/>
+          <a:ext cx="0" cy="0"/>
+          <a:chOff x="0" y="0"/>
+          <a:chExt cx="0" cy="0"/>
+        </a:xfrm>
+      </p:grpSpPr>
+      <p:sp>
+        <p:nvSpPr>
+          <p:cNvPr id="4" name="Content Placeholder 2">
+            <a:extLst>
+              <a:ext uri="{FF2B5EF4-FFF2-40B4-BE49-F238E27FC236}">
+                <a16:creationId xmlns:a16="http://schemas.microsoft.com/office/drawing/2014/main" id="{F8346893-2CF7-4317-897A-50D55FD206DA}"/>
+              </a:ext>
+            </a:extLst>
+          </p:cNvPr>
+          <p:cNvSpPr txBox="1">
+            <a:spLocks/>
+          </p:cNvSpPr>
+          <p:nvPr/>
+        </p:nvSpPr>
+        <p:spPr>
+          <a:xfrm>
+            <a:off x="80682" y="71717"/>
+            <a:ext cx="12192000" cy="1488141"/>
+          </a:xfrm>
+          <a:prstGeom prst="rect">
+            <a:avLst/>
+          </a:prstGeom>
+          <a:effectLst>
+            <a:outerShdw blurRad="25400" dir="17880000">
+              <a:srgbClr val="000000">
+                <a:alpha val="46000"/>
+              </a:srgbClr>
+            </a:outerShdw>
+          </a:effectLst>
+        </p:spPr>
+        <p:txBody>
+          <a:bodyPr vert="horz" lIns="91440" tIns="45720" rIns="91440" bIns="45720" rtlCol="0" anchor="t">
+            <a:normAutofit/>
+          </a:bodyPr>
+          <a:lstStyle>
+            <a:lvl1pPr marL="342900" indent="-306000" algn="l" defTabSz="457200" rtl="0" eaLnBrk="1" latinLnBrk="0" hangingPunct="1">
+              <a:spcBef>
+                <a:spcPct val="20000"/>
+              </a:spcBef>
+              <a:spcAft>
+                <a:spcPts val="600"/>
+              </a:spcAft>
+              <a:buClr>
+                <a:schemeClr val="tx2"/>
+              </a:buClr>
+              <a:buSzPct val="70000"/>
+              <a:buFont typeface="Wingdings 2" charset="2"/>
+              <a:buChar char=""/>
+              <a:defRPr sz="2000" kern="1200">
+                <a:ln>
+                  <a:solidFill>
+                    <a:schemeClr val="bg1">
+                      <a:lumMod val="75000"/>
+                      <a:lumOff val="25000"/>
+                      <a:alpha val="10000"/>
+                    </a:schemeClr>
+                  </a:solidFill>
+                </a:ln>
+                <a:solidFill>
+                  <a:schemeClr val="tx2"/>
+                </a:solidFill>
+                <a:effectLst>
+                  <a:outerShdw blurRad="9525" dist="25400" dir="14640000" algn="tl" rotWithShape="0">
+                    <a:schemeClr val="bg1">
+                      <a:alpha val="30000"/>
+                    </a:schemeClr>
+                  </a:outerShdw>
+                </a:effectLst>
+                <a:latin typeface="+mn-lt"/>
+                <a:ea typeface="+mn-ea"/>
+                <a:cs typeface="+mn-cs"/>
+              </a:defRPr>
+            </a:lvl1pPr>
+            <a:lvl2pPr marL="720000" indent="-270000" algn="l" defTabSz="457200" rtl="0" eaLnBrk="1" latinLnBrk="0" hangingPunct="1">
+              <a:spcBef>
+                <a:spcPct val="20000"/>
+              </a:spcBef>
+              <a:spcAft>
+                <a:spcPts val="600"/>
+              </a:spcAft>
+              <a:buClr>
+                <a:schemeClr val="tx2"/>
+              </a:buClr>
+              <a:buSzPct val="70000"/>
+              <a:buFont typeface="Wingdings 2" charset="2"/>
+              <a:buChar char=""/>
+              <a:defRPr sz="1800" kern="1200">
+                <a:ln>
+                  <a:solidFill>
+                    <a:schemeClr val="bg1">
+                      <a:lumMod val="75000"/>
+                      <a:lumOff val="25000"/>
+                      <a:alpha val="10000"/>
+                    </a:schemeClr>
+                  </a:solidFill>
+                </a:ln>
+                <a:solidFill>
+                  <a:schemeClr val="tx2"/>
+                </a:solidFill>
+                <a:effectLst>
+                  <a:outerShdw blurRad="9525" dist="25400" dir="14640000" algn="tl" rotWithShape="0">
+                    <a:schemeClr val="bg1">
+                      <a:alpha val="30000"/>
+                    </a:schemeClr>
+                  </a:outerShdw>
+                </a:effectLst>
+                <a:latin typeface="+mn-lt"/>
+                <a:ea typeface="+mn-ea"/>
+                <a:cs typeface="+mn-cs"/>
+              </a:defRPr>
+            </a:lvl2pPr>
+            <a:lvl3pPr marL="1026000" indent="-216000" algn="l" defTabSz="457200" rtl="0" eaLnBrk="1" latinLnBrk="0" hangingPunct="1">
+              <a:spcBef>
+                <a:spcPct val="20000"/>
+              </a:spcBef>
+              <a:spcAft>
+                <a:spcPts val="600"/>
+              </a:spcAft>
+              <a:buClr>
+                <a:schemeClr val="tx2"/>
+              </a:buClr>
+              <a:buSzPct val="70000"/>
+              <a:buFont typeface="Wingdings 2" charset="2"/>
+              <a:buChar char=""/>
+              <a:defRPr sz="1600" kern="1200">
+                <a:ln>
+                  <a:solidFill>
+                    <a:schemeClr val="bg1">
+                      <a:lumMod val="75000"/>
+                      <a:lumOff val="25000"/>
+                      <a:alpha val="10000"/>
+                    </a:schemeClr>
+                  </a:solidFill>
+                </a:ln>
+                <a:solidFill>
+                  <a:schemeClr val="tx2"/>
+                </a:solidFill>
+                <a:effectLst>
+                  <a:outerShdw blurRad="9525" dist="25400" dir="14640000" algn="tl" rotWithShape="0">
+                    <a:schemeClr val="bg1">
+                      <a:alpha val="30000"/>
+                    </a:schemeClr>
+                  </a:outerShdw>
+                </a:effectLst>
+                <a:latin typeface="+mn-lt"/>
+                <a:ea typeface="+mn-ea"/>
+                <a:cs typeface="+mn-cs"/>
+              </a:defRPr>
+            </a:lvl3pPr>
+            <a:lvl4pPr marL="1386000" indent="-216000" algn="l" defTabSz="457200" rtl="0" eaLnBrk="1" latinLnBrk="0" hangingPunct="1">
+              <a:spcBef>
+                <a:spcPct val="20000"/>
+              </a:spcBef>
+              <a:spcAft>
+                <a:spcPts val="600"/>
+              </a:spcAft>
+              <a:buClr>
+                <a:schemeClr val="tx2"/>
+              </a:buClr>
+              <a:buSzPct val="70000"/>
+              <a:buFont typeface="Wingdings 2" charset="2"/>
+              <a:buChar char=""/>
+              <a:defRPr sz="1400" kern="1200">
+                <a:ln>
+                  <a:solidFill>
+                    <a:schemeClr val="bg1">
+                      <a:lumMod val="75000"/>
+                      <a:lumOff val="25000"/>
+                      <a:alpha val="10000"/>
+                    </a:schemeClr>
+                  </a:solidFill>
+                </a:ln>
+                <a:solidFill>
+                  <a:schemeClr val="tx2"/>
+                </a:solidFill>
+                <a:effectLst>
+                  <a:outerShdw blurRad="9525" dist="25400" dir="14640000" algn="tl" rotWithShape="0">
+                    <a:schemeClr val="bg1">
+                      <a:alpha val="30000"/>
+                    </a:schemeClr>
+                  </a:outerShdw>
+                </a:effectLst>
+                <a:latin typeface="+mn-lt"/>
+                <a:ea typeface="+mn-ea"/>
+                <a:cs typeface="+mn-cs"/>
+              </a:defRPr>
+            </a:lvl4pPr>
+            <a:lvl5pPr marL="1674000" indent="-216000" algn="l" defTabSz="457200" rtl="0" eaLnBrk="1" latinLnBrk="0" hangingPunct="1">
+              <a:spcBef>
+                <a:spcPct val="20000"/>
+              </a:spcBef>
+              <a:spcAft>
+                <a:spcPts val="600"/>
+              </a:spcAft>
+              <a:buClr>
+                <a:schemeClr val="tx2"/>
+              </a:buClr>
+              <a:buSzPct val="70000"/>
+              <a:buFont typeface="Wingdings 2" charset="2"/>
+              <a:buChar char=""/>
+              <a:defRPr sz="1400" kern="1200">
+                <a:ln>
+                  <a:solidFill>
+                    <a:schemeClr val="bg1">
+                      <a:lumMod val="75000"/>
+                      <a:lumOff val="25000"/>
+                      <a:alpha val="10000"/>
+                    </a:schemeClr>
+                  </a:solidFill>
+                </a:ln>
+                <a:solidFill>
+                  <a:schemeClr val="tx2"/>
+                </a:solidFill>
+                <a:effectLst>
+                  <a:outerShdw blurRad="9525" dist="25400" dir="14640000" algn="tl" rotWithShape="0">
+                    <a:schemeClr val="bg1">
+                      <a:alpha val="30000"/>
+                    </a:schemeClr>
+                  </a:outerShdw>
+                </a:effectLst>
+                <a:latin typeface="+mn-lt"/>
+                <a:ea typeface="+mn-ea"/>
+                <a:cs typeface="+mn-cs"/>
+              </a:defRPr>
+            </a:lvl5pPr>
+            <a:lvl6pPr marL="2014600" indent="-228600" algn="l" defTabSz="457200" rtl="0" eaLnBrk="1" latinLnBrk="0" hangingPunct="1">
+              <a:spcBef>
+                <a:spcPct val="20000"/>
+              </a:spcBef>
+              <a:spcAft>
+                <a:spcPts val="600"/>
+              </a:spcAft>
+              <a:buClr>
+                <a:schemeClr val="tx2"/>
+              </a:buClr>
+              <a:buSzPct val="70000"/>
+              <a:buFont typeface="Wingdings 2" charset="2"/>
+              <a:buChar char=""/>
+              <a:defRPr sz="1400" kern="1200">
+                <a:ln>
+                  <a:solidFill>
+                    <a:schemeClr val="bg1">
+                      <a:lumMod val="75000"/>
+                      <a:lumOff val="25000"/>
+                      <a:alpha val="10000"/>
+                    </a:schemeClr>
+                  </a:solidFill>
+                </a:ln>
+                <a:solidFill>
+                  <a:schemeClr val="tx2"/>
+                </a:solidFill>
+                <a:effectLst>
+                  <a:outerShdw blurRad="9525" dist="25400" dir="14640000" algn="tl" rotWithShape="0">
+                    <a:schemeClr val="bg1">
+                      <a:alpha val="30000"/>
+                    </a:schemeClr>
+                  </a:outerShdw>
+                </a:effectLst>
+                <a:latin typeface="+mn-lt"/>
+                <a:ea typeface="+mn-ea"/>
+                <a:cs typeface="+mn-cs"/>
+              </a:defRPr>
+            </a:lvl6pPr>
+            <a:lvl7pPr marL="2401800" indent="-228600" algn="l" defTabSz="457200" rtl="0" eaLnBrk="1" latinLnBrk="0" hangingPunct="1">
+              <a:spcBef>
+                <a:spcPct val="20000"/>
+              </a:spcBef>
+              <a:spcAft>
+                <a:spcPts val="600"/>
+              </a:spcAft>
+              <a:buClr>
+                <a:schemeClr val="tx2"/>
+              </a:buClr>
+              <a:buSzPct val="70000"/>
+              <a:buFont typeface="Wingdings 2" charset="2"/>
+              <a:buChar char=""/>
+              <a:defRPr sz="1400" kern="1200">
+                <a:ln>
+                  <a:solidFill>
+                    <a:schemeClr val="bg1">
+                      <a:lumMod val="75000"/>
+                      <a:lumOff val="25000"/>
+                      <a:alpha val="10000"/>
+                    </a:schemeClr>
+                  </a:solidFill>
+                </a:ln>
+                <a:solidFill>
+                  <a:schemeClr val="tx2"/>
+                </a:solidFill>
+                <a:effectLst>
+                  <a:outerShdw blurRad="9525" dist="25400" dir="14640000" algn="tl" rotWithShape="0">
+                    <a:schemeClr val="bg1">
+                      <a:alpha val="30000"/>
+                    </a:schemeClr>
+                  </a:outerShdw>
+                </a:effectLst>
+                <a:latin typeface="+mn-lt"/>
+                <a:ea typeface="+mn-ea"/>
+                <a:cs typeface="+mn-cs"/>
+              </a:defRPr>
+            </a:lvl7pPr>
+            <a:lvl8pPr marL="2789000" indent="-228600" algn="l" defTabSz="457200" rtl="0" eaLnBrk="1" latinLnBrk="0" hangingPunct="1">
+              <a:spcBef>
+                <a:spcPct val="20000"/>
+              </a:spcBef>
+              <a:spcAft>
+                <a:spcPts val="600"/>
+              </a:spcAft>
+              <a:buClr>
+                <a:schemeClr val="tx2"/>
+              </a:buClr>
+              <a:buSzPct val="70000"/>
+              <a:buFont typeface="Wingdings 2" charset="2"/>
+              <a:buChar char=""/>
+              <a:defRPr sz="1400" kern="1200">
+                <a:ln>
+                  <a:solidFill>
+                    <a:schemeClr val="bg1">
+                      <a:lumMod val="75000"/>
+                      <a:lumOff val="25000"/>
+                      <a:alpha val="10000"/>
+                    </a:schemeClr>
+                  </a:solidFill>
+                </a:ln>
+                <a:solidFill>
+                  <a:schemeClr val="tx2"/>
+                </a:solidFill>
+                <a:effectLst>
+                  <a:outerShdw blurRad="9525" dist="25400" dir="14640000" algn="tl" rotWithShape="0">
+                    <a:schemeClr val="bg1">
+                      <a:alpha val="30000"/>
+                    </a:schemeClr>
+                  </a:outerShdw>
+                </a:effectLst>
+                <a:latin typeface="+mn-lt"/>
+                <a:ea typeface="+mn-ea"/>
+                <a:cs typeface="+mn-cs"/>
+              </a:defRPr>
+            </a:lvl8pPr>
+            <a:lvl9pPr marL="3106200" indent="-228600" algn="l" defTabSz="457200" rtl="0" eaLnBrk="1" latinLnBrk="0" hangingPunct="1">
+              <a:spcBef>
+                <a:spcPct val="20000"/>
+              </a:spcBef>
+              <a:spcAft>
+                <a:spcPts val="600"/>
+              </a:spcAft>
+              <a:buClr>
+                <a:schemeClr val="tx2"/>
+              </a:buClr>
+              <a:buSzPct val="70000"/>
+              <a:buFont typeface="Wingdings 2" charset="2"/>
+              <a:buChar char=""/>
+              <a:defRPr sz="1400" kern="1200">
+                <a:ln>
+                  <a:solidFill>
+                    <a:schemeClr val="bg1">
+                      <a:lumMod val="75000"/>
+                      <a:lumOff val="25000"/>
+                      <a:alpha val="10000"/>
+                    </a:schemeClr>
+                  </a:solidFill>
+                </a:ln>
+                <a:solidFill>
+                  <a:schemeClr val="tx2"/>
+                </a:solidFill>
+                <a:effectLst>
+                  <a:outerShdw blurRad="9525" dist="25400" dir="14640000" algn="tl" rotWithShape="0">
+                    <a:schemeClr val="bg1">
+                      <a:alpha val="30000"/>
+                    </a:schemeClr>
+                  </a:outerShdw>
+                </a:effectLst>
+                <a:latin typeface="+mn-lt"/>
+                <a:ea typeface="+mn-ea"/>
+                <a:cs typeface="+mn-cs"/>
+              </a:defRPr>
+            </a:lvl9pPr>
+          </a:lstStyle>
+          <a:p>
+            <a:r>
+              <a:rPr lang="en-US" dirty="0" err="1"/>
+              <a:t>Vidimo</a:t>
+            </a:r>
+            <a:r>
+              <a:rPr lang="en-US" dirty="0"/>
+              <a:t> da </a:t>
+            </a:r>
+            <a:r>
+              <a:rPr lang="en-US" dirty="0" err="1"/>
+              <a:t>rasudjivanje</a:t>
+            </a:r>
+            <a:r>
+              <a:rPr lang="en-US" dirty="0"/>
+              <a:t> po </a:t>
+            </a:r>
+            <a:r>
+              <a:rPr lang="en-US" dirty="0" err="1"/>
+              <a:t>pravilima</a:t>
+            </a:r>
+            <a:r>
+              <a:rPr lang="en-US" dirty="0"/>
+              <a:t> </a:t>
+            </a:r>
+            <a:r>
+              <a:rPr lang="en-US" dirty="0" err="1"/>
+              <a:t>daje</a:t>
+            </a:r>
+            <a:r>
+              <a:rPr lang="en-US" dirty="0"/>
+              <a:t> </a:t>
+            </a:r>
+            <a:r>
+              <a:rPr lang="en-US" dirty="0" err="1"/>
+              <a:t>standardni</a:t>
+            </a:r>
+            <a:r>
+              <a:rPr lang="en-US" dirty="0"/>
+              <a:t> </a:t>
+            </a:r>
+            <a:r>
+              <a:rPr lang="en-US" dirty="0" err="1"/>
+              <a:t>opseg</a:t>
+            </a:r>
+            <a:r>
+              <a:rPr lang="en-US" dirty="0"/>
+              <a:t> </a:t>
+            </a:r>
+            <a:r>
+              <a:rPr lang="en-US" dirty="0" err="1"/>
+              <a:t>minimalne</a:t>
+            </a:r>
+            <a:r>
+              <a:rPr lang="en-US" dirty="0"/>
+              <a:t> </a:t>
+            </a:r>
+            <a:r>
+              <a:rPr lang="en-US" dirty="0" err="1"/>
+              <a:t>kazne</a:t>
+            </a:r>
+            <a:r>
+              <a:rPr lang="en-US" dirty="0"/>
+              <a:t> </a:t>
+            </a:r>
+            <a:r>
+              <a:rPr lang="en-US" dirty="0" err="1"/>
+              <a:t>kao</a:t>
+            </a:r>
+            <a:r>
+              <a:rPr lang="en-US" dirty="0"/>
+              <a:t> </a:t>
+            </a:r>
+            <a:r>
+              <a:rPr lang="en-US" dirty="0" err="1"/>
+              <a:t>što</a:t>
+            </a:r>
+            <a:r>
+              <a:rPr lang="en-US" dirty="0"/>
+              <a:t> je </a:t>
+            </a:r>
+            <a:r>
+              <a:rPr lang="en-US" dirty="0" err="1"/>
+              <a:t>propisano</a:t>
+            </a:r>
+            <a:endParaRPr lang="en-US" dirty="0"/>
+          </a:p>
+        </p:txBody>
+      </p:sp>
+      <p:pic>
+        <p:nvPicPr>
+          <p:cNvPr id="8" name="Picture 7">
+            <a:extLst>
+              <a:ext uri="{FF2B5EF4-FFF2-40B4-BE49-F238E27FC236}">
+                <a16:creationId xmlns:a16="http://schemas.microsoft.com/office/drawing/2014/main" id="{4AD275EB-D30B-457F-B84B-BD1BC7D39CF7}"/>
+              </a:ext>
+            </a:extLst>
+          </p:cNvPr>
+          <p:cNvPicPr>
+            <a:picLocks noChangeAspect="1"/>
+          </p:cNvPicPr>
+          <p:nvPr/>
+        </p:nvPicPr>
+        <p:blipFill>
+          <a:blip r:embed="rId2"/>
+          <a:stretch>
+            <a:fillRect/>
+          </a:stretch>
+        </p:blipFill>
+        <p:spPr>
+          <a:xfrm>
+            <a:off x="6366941" y="1083541"/>
+            <a:ext cx="5744377" cy="981212"/>
+          </a:xfrm>
+          <a:prstGeom prst="rect">
+            <a:avLst/>
+          </a:prstGeom>
+        </p:spPr>
+      </p:pic>
+      <p:pic>
+        <p:nvPicPr>
+          <p:cNvPr id="10" name="Picture 9">
+            <a:extLst>
+              <a:ext uri="{FF2B5EF4-FFF2-40B4-BE49-F238E27FC236}">
+                <a16:creationId xmlns:a16="http://schemas.microsoft.com/office/drawing/2014/main" id="{96C2D31C-6BB3-43A8-818B-613CBB062772}"/>
+              </a:ext>
+            </a:extLst>
+          </p:cNvPr>
+          <p:cNvPicPr>
+            <a:picLocks noChangeAspect="1"/>
+          </p:cNvPicPr>
+          <p:nvPr/>
+        </p:nvPicPr>
+        <p:blipFill>
+          <a:blip r:embed="rId3"/>
+          <a:stretch>
+            <a:fillRect/>
+          </a:stretch>
+        </p:blipFill>
+        <p:spPr>
+          <a:xfrm>
+            <a:off x="2125618" y="2268794"/>
+            <a:ext cx="10002646" cy="4553585"/>
+          </a:xfrm>
+          <a:prstGeom prst="rect">
+            <a:avLst/>
+          </a:prstGeom>
+        </p:spPr>
+      </p:pic>
+      <p:pic>
+        <p:nvPicPr>
+          <p:cNvPr id="12" name="Picture 11">
+            <a:extLst>
+              <a:ext uri="{FF2B5EF4-FFF2-40B4-BE49-F238E27FC236}">
+                <a16:creationId xmlns:a16="http://schemas.microsoft.com/office/drawing/2014/main" id="{40EAA9CF-DA19-48BD-A9B7-54D4AECB72D9}"/>
+              </a:ext>
+            </a:extLst>
+          </p:cNvPr>
+          <p:cNvPicPr>
+            <a:picLocks noChangeAspect="1"/>
+          </p:cNvPicPr>
+          <p:nvPr/>
+        </p:nvPicPr>
+        <p:blipFill>
+          <a:blip r:embed="rId4"/>
+          <a:stretch>
+            <a:fillRect/>
+          </a:stretch>
+        </p:blipFill>
+        <p:spPr>
+          <a:xfrm>
+            <a:off x="2125618" y="1763899"/>
+            <a:ext cx="2191056" cy="504895"/>
+          </a:xfrm>
+          <a:prstGeom prst="rect">
+            <a:avLst/>
+          </a:prstGeom>
+        </p:spPr>
+      </p:pic>
+      <p:pic>
+        <p:nvPicPr>
+          <p:cNvPr id="14" name="Picture 13">
+            <a:extLst>
+              <a:ext uri="{FF2B5EF4-FFF2-40B4-BE49-F238E27FC236}">
+                <a16:creationId xmlns:a16="http://schemas.microsoft.com/office/drawing/2014/main" id="{379840EB-17F1-4DA1-9CB2-87248254E1CC}"/>
+              </a:ext>
+            </a:extLst>
+          </p:cNvPr>
+          <p:cNvPicPr>
+            <a:picLocks noChangeAspect="1"/>
+          </p:cNvPicPr>
+          <p:nvPr/>
+        </p:nvPicPr>
+        <p:blipFill>
+          <a:blip r:embed="rId5"/>
+          <a:stretch>
+            <a:fillRect/>
+          </a:stretch>
+        </p:blipFill>
+        <p:spPr>
+          <a:xfrm>
+            <a:off x="6366941" y="650868"/>
+            <a:ext cx="1962424" cy="457264"/>
+          </a:xfrm>
+          <a:prstGeom prst="rect">
+            <a:avLst/>
+          </a:prstGeom>
+        </p:spPr>
+      </p:pic>
+      <p:sp>
+        <p:nvSpPr>
+          <p:cNvPr id="15" name="Content Placeholder 2">
+            <a:extLst>
+              <a:ext uri="{FF2B5EF4-FFF2-40B4-BE49-F238E27FC236}">
+                <a16:creationId xmlns:a16="http://schemas.microsoft.com/office/drawing/2014/main" id="{DD1E5489-EC81-4D9C-BA24-A162211829B5}"/>
+              </a:ext>
+            </a:extLst>
+          </p:cNvPr>
+          <p:cNvSpPr txBox="1">
+            <a:spLocks/>
+          </p:cNvSpPr>
+          <p:nvPr/>
+        </p:nvSpPr>
+        <p:spPr>
+          <a:xfrm>
+            <a:off x="-53788" y="576612"/>
+            <a:ext cx="5253317" cy="1488141"/>
+          </a:xfrm>
+          <a:prstGeom prst="rect">
+            <a:avLst/>
+          </a:prstGeom>
+          <a:effectLst>
+            <a:outerShdw blurRad="25400" dir="17880000">
+              <a:srgbClr val="000000">
+                <a:alpha val="46000"/>
+              </a:srgbClr>
+            </a:outerShdw>
+          </a:effectLst>
+        </p:spPr>
+        <p:txBody>
+          <a:bodyPr vert="horz" lIns="91440" tIns="45720" rIns="91440" bIns="45720" rtlCol="0" anchor="t">
+            <a:normAutofit/>
+          </a:bodyPr>
+          <a:lstStyle>
+            <a:lvl1pPr marL="342900" indent="-306000" algn="l" defTabSz="457200" rtl="0" eaLnBrk="1" latinLnBrk="0" hangingPunct="1">
+              <a:spcBef>
+                <a:spcPct val="20000"/>
+              </a:spcBef>
+              <a:spcAft>
+                <a:spcPts val="600"/>
+              </a:spcAft>
+              <a:buClr>
+                <a:schemeClr val="tx2"/>
+              </a:buClr>
+              <a:buSzPct val="70000"/>
+              <a:buFont typeface="Wingdings 2" charset="2"/>
+              <a:buChar char=""/>
+              <a:defRPr sz="2000" kern="1200">
+                <a:ln>
+                  <a:solidFill>
+                    <a:schemeClr val="bg1">
+                      <a:lumMod val="75000"/>
+                      <a:lumOff val="25000"/>
+                      <a:alpha val="10000"/>
+                    </a:schemeClr>
+                  </a:solidFill>
+                </a:ln>
+                <a:solidFill>
+                  <a:schemeClr val="tx2"/>
+                </a:solidFill>
+                <a:effectLst>
+                  <a:outerShdw blurRad="9525" dist="25400" dir="14640000" algn="tl" rotWithShape="0">
+                    <a:schemeClr val="bg1">
+                      <a:alpha val="30000"/>
+                    </a:schemeClr>
+                  </a:outerShdw>
+                </a:effectLst>
+                <a:latin typeface="+mn-lt"/>
+                <a:ea typeface="+mn-ea"/>
+                <a:cs typeface="+mn-cs"/>
+              </a:defRPr>
+            </a:lvl1pPr>
+            <a:lvl2pPr marL="720000" indent="-270000" algn="l" defTabSz="457200" rtl="0" eaLnBrk="1" latinLnBrk="0" hangingPunct="1">
+              <a:spcBef>
+                <a:spcPct val="20000"/>
+              </a:spcBef>
+              <a:spcAft>
+                <a:spcPts val="600"/>
+              </a:spcAft>
+              <a:buClr>
+                <a:schemeClr val="tx2"/>
+              </a:buClr>
+              <a:buSzPct val="70000"/>
+              <a:buFont typeface="Wingdings 2" charset="2"/>
+              <a:buChar char=""/>
+              <a:defRPr sz="1800" kern="1200">
+                <a:ln>
+                  <a:solidFill>
+                    <a:schemeClr val="bg1">
+                      <a:lumMod val="75000"/>
+                      <a:lumOff val="25000"/>
+                      <a:alpha val="10000"/>
+                    </a:schemeClr>
+                  </a:solidFill>
+                </a:ln>
+                <a:solidFill>
+                  <a:schemeClr val="tx2"/>
+                </a:solidFill>
+                <a:effectLst>
+                  <a:outerShdw blurRad="9525" dist="25400" dir="14640000" algn="tl" rotWithShape="0">
+                    <a:schemeClr val="bg1">
+                      <a:alpha val="30000"/>
+                    </a:schemeClr>
+                  </a:outerShdw>
+                </a:effectLst>
+                <a:latin typeface="+mn-lt"/>
+                <a:ea typeface="+mn-ea"/>
+                <a:cs typeface="+mn-cs"/>
+              </a:defRPr>
+            </a:lvl2pPr>
+            <a:lvl3pPr marL="1026000" indent="-216000" algn="l" defTabSz="457200" rtl="0" eaLnBrk="1" latinLnBrk="0" hangingPunct="1">
+              <a:spcBef>
+                <a:spcPct val="20000"/>
+              </a:spcBef>
+              <a:spcAft>
+                <a:spcPts val="600"/>
+              </a:spcAft>
+              <a:buClr>
+                <a:schemeClr val="tx2"/>
+              </a:buClr>
+              <a:buSzPct val="70000"/>
+              <a:buFont typeface="Wingdings 2" charset="2"/>
+              <a:buChar char=""/>
+              <a:defRPr sz="1600" kern="1200">
+                <a:ln>
+                  <a:solidFill>
+                    <a:schemeClr val="bg1">
+                      <a:lumMod val="75000"/>
+                      <a:lumOff val="25000"/>
+                      <a:alpha val="10000"/>
+                    </a:schemeClr>
+                  </a:solidFill>
+                </a:ln>
+                <a:solidFill>
+                  <a:schemeClr val="tx2"/>
+                </a:solidFill>
+                <a:effectLst>
+                  <a:outerShdw blurRad="9525" dist="25400" dir="14640000" algn="tl" rotWithShape="0">
+                    <a:schemeClr val="bg1">
+                      <a:alpha val="30000"/>
+                    </a:schemeClr>
+                  </a:outerShdw>
+                </a:effectLst>
+                <a:latin typeface="+mn-lt"/>
+                <a:ea typeface="+mn-ea"/>
+                <a:cs typeface="+mn-cs"/>
+              </a:defRPr>
+            </a:lvl3pPr>
+            <a:lvl4pPr marL="1386000" indent="-216000" algn="l" defTabSz="457200" rtl="0" eaLnBrk="1" latinLnBrk="0" hangingPunct="1">
+              <a:spcBef>
+                <a:spcPct val="20000"/>
+              </a:spcBef>
+              <a:spcAft>
+                <a:spcPts val="600"/>
+              </a:spcAft>
+              <a:buClr>
+                <a:schemeClr val="tx2"/>
+              </a:buClr>
+              <a:buSzPct val="70000"/>
+              <a:buFont typeface="Wingdings 2" charset="2"/>
+              <a:buChar char=""/>
+              <a:defRPr sz="1400" kern="1200">
+                <a:ln>
+                  <a:solidFill>
+                    <a:schemeClr val="bg1">
+                      <a:lumMod val="75000"/>
+                      <a:lumOff val="25000"/>
+                      <a:alpha val="10000"/>
+                    </a:schemeClr>
+                  </a:solidFill>
+                </a:ln>
+                <a:solidFill>
+                  <a:schemeClr val="tx2"/>
+                </a:solidFill>
+                <a:effectLst>
+                  <a:outerShdw blurRad="9525" dist="25400" dir="14640000" algn="tl" rotWithShape="0">
+                    <a:schemeClr val="bg1">
+                      <a:alpha val="30000"/>
+                    </a:schemeClr>
+                  </a:outerShdw>
+                </a:effectLst>
+                <a:latin typeface="+mn-lt"/>
+                <a:ea typeface="+mn-ea"/>
+                <a:cs typeface="+mn-cs"/>
+              </a:defRPr>
+            </a:lvl4pPr>
+            <a:lvl5pPr marL="1674000" indent="-216000" algn="l" defTabSz="457200" rtl="0" eaLnBrk="1" latinLnBrk="0" hangingPunct="1">
+              <a:spcBef>
+                <a:spcPct val="20000"/>
+              </a:spcBef>
+              <a:spcAft>
+                <a:spcPts val="600"/>
+              </a:spcAft>
+              <a:buClr>
+                <a:schemeClr val="tx2"/>
+              </a:buClr>
+              <a:buSzPct val="70000"/>
+              <a:buFont typeface="Wingdings 2" charset="2"/>
+              <a:buChar char=""/>
+              <a:defRPr sz="1400" kern="1200">
+                <a:ln>
+                  <a:solidFill>
+                    <a:schemeClr val="bg1">
+                      <a:lumMod val="75000"/>
+                      <a:lumOff val="25000"/>
+                      <a:alpha val="10000"/>
+                    </a:schemeClr>
+                  </a:solidFill>
+                </a:ln>
+                <a:solidFill>
+                  <a:schemeClr val="tx2"/>
+                </a:solidFill>
+                <a:effectLst>
+                  <a:outerShdw blurRad="9525" dist="25400" dir="14640000" algn="tl" rotWithShape="0">
+                    <a:schemeClr val="bg1">
+                      <a:alpha val="30000"/>
+                    </a:schemeClr>
+                  </a:outerShdw>
+                </a:effectLst>
+                <a:latin typeface="+mn-lt"/>
+                <a:ea typeface="+mn-ea"/>
+                <a:cs typeface="+mn-cs"/>
+              </a:defRPr>
+            </a:lvl5pPr>
+            <a:lvl6pPr marL="2014600" indent="-228600" algn="l" defTabSz="457200" rtl="0" eaLnBrk="1" latinLnBrk="0" hangingPunct="1">
+              <a:spcBef>
+                <a:spcPct val="20000"/>
+              </a:spcBef>
+              <a:spcAft>
+                <a:spcPts val="600"/>
+              </a:spcAft>
+              <a:buClr>
+                <a:schemeClr val="tx2"/>
+              </a:buClr>
+              <a:buSzPct val="70000"/>
+              <a:buFont typeface="Wingdings 2" charset="2"/>
+              <a:buChar char=""/>
+              <a:defRPr sz="1400" kern="1200">
+                <a:ln>
+                  <a:solidFill>
+                    <a:schemeClr val="bg1">
+                      <a:lumMod val="75000"/>
+                      <a:lumOff val="25000"/>
+                      <a:alpha val="10000"/>
+                    </a:schemeClr>
+                  </a:solidFill>
+                </a:ln>
+                <a:solidFill>
+                  <a:schemeClr val="tx2"/>
+                </a:solidFill>
+                <a:effectLst>
+                  <a:outerShdw blurRad="9525" dist="25400" dir="14640000" algn="tl" rotWithShape="0">
+                    <a:schemeClr val="bg1">
+                      <a:alpha val="30000"/>
+                    </a:schemeClr>
+                  </a:outerShdw>
+                </a:effectLst>
+                <a:latin typeface="+mn-lt"/>
+                <a:ea typeface="+mn-ea"/>
+                <a:cs typeface="+mn-cs"/>
+              </a:defRPr>
+            </a:lvl6pPr>
+            <a:lvl7pPr marL="2401800" indent="-228600" algn="l" defTabSz="457200" rtl="0" eaLnBrk="1" latinLnBrk="0" hangingPunct="1">
+              <a:spcBef>
+                <a:spcPct val="20000"/>
+              </a:spcBef>
+              <a:spcAft>
+                <a:spcPts val="600"/>
+              </a:spcAft>
+              <a:buClr>
+                <a:schemeClr val="tx2"/>
+              </a:buClr>
+              <a:buSzPct val="70000"/>
+              <a:buFont typeface="Wingdings 2" charset="2"/>
+              <a:buChar char=""/>
+              <a:defRPr sz="1400" kern="1200">
+                <a:ln>
+                  <a:solidFill>
+                    <a:schemeClr val="bg1">
+                      <a:lumMod val="75000"/>
+                      <a:lumOff val="25000"/>
+                      <a:alpha val="10000"/>
+                    </a:schemeClr>
+                  </a:solidFill>
+                </a:ln>
+                <a:solidFill>
+                  <a:schemeClr val="tx2"/>
+                </a:solidFill>
+                <a:effectLst>
+                  <a:outerShdw blurRad="9525" dist="25400" dir="14640000" algn="tl" rotWithShape="0">
+                    <a:schemeClr val="bg1">
+                      <a:alpha val="30000"/>
+                    </a:schemeClr>
+                  </a:outerShdw>
+                </a:effectLst>
+                <a:latin typeface="+mn-lt"/>
+                <a:ea typeface="+mn-ea"/>
+                <a:cs typeface="+mn-cs"/>
+              </a:defRPr>
+            </a:lvl7pPr>
+            <a:lvl8pPr marL="2789000" indent="-228600" algn="l" defTabSz="457200" rtl="0" eaLnBrk="1" latinLnBrk="0" hangingPunct="1">
+              <a:spcBef>
+                <a:spcPct val="20000"/>
+              </a:spcBef>
+              <a:spcAft>
+                <a:spcPts val="600"/>
+              </a:spcAft>
+              <a:buClr>
+                <a:schemeClr val="tx2"/>
+              </a:buClr>
+              <a:buSzPct val="70000"/>
+              <a:buFont typeface="Wingdings 2" charset="2"/>
+              <a:buChar char=""/>
+              <a:defRPr sz="1400" kern="1200">
+                <a:ln>
+                  <a:solidFill>
+                    <a:schemeClr val="bg1">
+                      <a:lumMod val="75000"/>
+                      <a:lumOff val="25000"/>
+                      <a:alpha val="10000"/>
+                    </a:schemeClr>
+                  </a:solidFill>
+                </a:ln>
+                <a:solidFill>
+                  <a:schemeClr val="tx2"/>
+                </a:solidFill>
+                <a:effectLst>
+                  <a:outerShdw blurRad="9525" dist="25400" dir="14640000" algn="tl" rotWithShape="0">
+                    <a:schemeClr val="bg1">
+                      <a:alpha val="30000"/>
+                    </a:schemeClr>
+                  </a:outerShdw>
+                </a:effectLst>
+                <a:latin typeface="+mn-lt"/>
+                <a:ea typeface="+mn-ea"/>
+                <a:cs typeface="+mn-cs"/>
+              </a:defRPr>
+            </a:lvl8pPr>
+            <a:lvl9pPr marL="3106200" indent="-228600" algn="l" defTabSz="457200" rtl="0" eaLnBrk="1" latinLnBrk="0" hangingPunct="1">
+              <a:spcBef>
+                <a:spcPct val="20000"/>
+              </a:spcBef>
+              <a:spcAft>
+                <a:spcPts val="600"/>
+              </a:spcAft>
+              <a:buClr>
+                <a:schemeClr val="tx2"/>
+              </a:buClr>
+              <a:buSzPct val="70000"/>
+              <a:buFont typeface="Wingdings 2" charset="2"/>
+              <a:buChar char=""/>
+              <a:defRPr sz="1400" kern="1200">
+                <a:ln>
+                  <a:solidFill>
+                    <a:schemeClr val="bg1">
+                      <a:lumMod val="75000"/>
+                      <a:lumOff val="25000"/>
+                      <a:alpha val="10000"/>
+                    </a:schemeClr>
+                  </a:solidFill>
+                </a:ln>
+                <a:solidFill>
+                  <a:schemeClr val="tx2"/>
+                </a:solidFill>
+                <a:effectLst>
+                  <a:outerShdw blurRad="9525" dist="25400" dir="14640000" algn="tl" rotWithShape="0">
+                    <a:schemeClr val="bg1">
+                      <a:alpha val="30000"/>
+                    </a:schemeClr>
+                  </a:outerShdw>
+                </a:effectLst>
+                <a:latin typeface="+mn-lt"/>
+                <a:ea typeface="+mn-ea"/>
+                <a:cs typeface="+mn-cs"/>
+              </a:defRPr>
+            </a:lvl9pPr>
+          </a:lstStyle>
+          <a:p>
+            <a:r>
+              <a:rPr lang="en-US" dirty="0" err="1"/>
+              <a:t>Rasudjivanje</a:t>
+            </a:r>
+            <a:r>
+              <a:rPr lang="en-US" dirty="0"/>
+              <a:t> po </a:t>
+            </a:r>
+            <a:r>
+              <a:rPr lang="en-US" dirty="0" err="1"/>
+              <a:t>slučajevima</a:t>
+            </a:r>
+            <a:r>
+              <a:rPr lang="en-US" dirty="0"/>
+              <a:t> </a:t>
+            </a:r>
+            <a:r>
+              <a:rPr lang="en-US" dirty="0" err="1"/>
+              <a:t>daje</a:t>
+            </a:r>
+            <a:r>
+              <a:rPr lang="en-US" dirty="0"/>
+              <a:t> </a:t>
+            </a:r>
+            <a:r>
+              <a:rPr lang="en-US" dirty="0" err="1"/>
+              <a:t>nešto</a:t>
+            </a:r>
+            <a:r>
+              <a:rPr lang="en-US" dirty="0"/>
+              <a:t> </a:t>
+            </a:r>
+            <a:r>
+              <a:rPr lang="en-US" dirty="0" err="1"/>
+              <a:t>blažu</a:t>
+            </a:r>
+            <a:r>
+              <a:rPr lang="en-US" dirty="0"/>
+              <a:t> </a:t>
+            </a:r>
+            <a:r>
+              <a:rPr lang="en-US" dirty="0" err="1"/>
+              <a:t>kaznu</a:t>
+            </a:r>
+            <a:r>
+              <a:rPr lang="en-US" dirty="0"/>
+              <a:t>, </a:t>
+            </a:r>
+            <a:r>
+              <a:rPr lang="en-US" dirty="0" err="1"/>
+              <a:t>vidimo</a:t>
+            </a:r>
+            <a:r>
+              <a:rPr lang="en-US" dirty="0"/>
+              <a:t> da </a:t>
+            </a:r>
+            <a:r>
+              <a:rPr lang="en-US" dirty="0" err="1"/>
+              <a:t>slićni</a:t>
+            </a:r>
+            <a:r>
+              <a:rPr lang="en-US" dirty="0"/>
+              <a:t> </a:t>
+            </a:r>
+            <a:r>
+              <a:rPr lang="en-US" dirty="0" err="1"/>
+              <a:t>slučajevi</a:t>
+            </a:r>
+            <a:r>
+              <a:rPr lang="en-US" dirty="0"/>
+              <a:t> </a:t>
+            </a:r>
+            <a:r>
+              <a:rPr lang="en-US" dirty="0" err="1"/>
+              <a:t>imaju</a:t>
+            </a:r>
+            <a:r>
+              <a:rPr lang="en-US" dirty="0"/>
+              <a:t> </a:t>
+            </a:r>
+            <a:r>
+              <a:rPr lang="en-US" dirty="0" err="1"/>
+              <a:t>manje</a:t>
+            </a:r>
+            <a:r>
+              <a:rPr lang="en-US" dirty="0"/>
+              <a:t> </a:t>
+            </a:r>
+            <a:r>
+              <a:rPr lang="en-US" dirty="0" err="1"/>
+              <a:t>kazne</a:t>
+            </a:r>
+            <a:r>
+              <a:rPr lang="en-US" dirty="0"/>
+              <a:t>.</a:t>
+            </a:r>
+          </a:p>
+        </p:txBody>
+      </p:sp>
+    </p:spTree>
+    <p:extLst>
+      <p:ext uri="{BB962C8B-B14F-4D97-AF65-F5344CB8AC3E}">
+        <p14:creationId xmlns:p14="http://schemas.microsoft.com/office/powerpoint/2010/main" val="2266265545"/>
+      </p:ext>
+    </p:extLst>
+  </p:cSld>
+  <p:clrMapOvr>
+    <a:masterClrMapping/>
+  </p:clrMapOvr>
+</p:sld>
+</file>
+
+<file path=ppt/slides/slide46.xml><?xml version="1.0" encoding="utf-8"?>
+<p:sld xmlns:a="http://schemas.openxmlformats.org/drawingml/2006/main" xmlns:r="http://schemas.openxmlformats.org/officeDocument/2006/relationships" xmlns:p="http://schemas.openxmlformats.org/presentationml/2006/main">
+  <p:cSld>
+    <p:spTree>
+      <p:nvGrpSpPr>
+        <p:cNvPr id="1" name=""/>
+        <p:cNvGrpSpPr/>
+        <p:nvPr/>
+      </p:nvGrpSpPr>
+      <p:grpSpPr>
+        <a:xfrm>
+          <a:off x="0" y="0"/>
+          <a:ext cx="0" cy="0"/>
+          <a:chOff x="0" y="0"/>
+          <a:chExt cx="0" cy="0"/>
+        </a:xfrm>
+      </p:grpSpPr>
+      <p:sp>
+        <p:nvSpPr>
+          <p:cNvPr id="3" name="Content Placeholder 2">
+            <a:extLst>
+              <a:ext uri="{FF2B5EF4-FFF2-40B4-BE49-F238E27FC236}">
+                <a16:creationId xmlns:a16="http://schemas.microsoft.com/office/drawing/2014/main" id="{730A1658-D5C7-4A59-808B-44262C07B475}"/>
+              </a:ext>
+            </a:extLst>
+          </p:cNvPr>
+          <p:cNvSpPr>
+            <a:spLocks noGrp="1"/>
+          </p:cNvSpPr>
+          <p:nvPr>
+            <p:ph idx="1"/>
+          </p:nvPr>
+        </p:nvSpPr>
+        <p:spPr>
+          <a:xfrm>
+            <a:off x="0" y="29155"/>
+            <a:ext cx="10353762" cy="4058751"/>
+          </a:xfrm>
+        </p:spPr>
+        <p:txBody>
+          <a:bodyPr/>
+          <a:lstStyle/>
+          <a:p>
+            <a:endParaRPr lang="en-US"/>
+          </a:p>
+        </p:txBody>
+      </p:sp>
+      <p:pic>
+        <p:nvPicPr>
+          <p:cNvPr id="5" name="Picture 4">
+            <a:extLst>
+              <a:ext uri="{FF2B5EF4-FFF2-40B4-BE49-F238E27FC236}">
+                <a16:creationId xmlns:a16="http://schemas.microsoft.com/office/drawing/2014/main" id="{B7D552B7-FC4F-4292-BE6B-D963B5ACD3EB}"/>
+              </a:ext>
+            </a:extLst>
+          </p:cNvPr>
+          <p:cNvPicPr>
+            <a:picLocks noChangeAspect="1"/>
+          </p:cNvPicPr>
+          <p:nvPr/>
+        </p:nvPicPr>
+        <p:blipFill>
+          <a:blip r:embed="rId2"/>
+          <a:stretch>
+            <a:fillRect/>
+          </a:stretch>
+        </p:blipFill>
+        <p:spPr>
+          <a:xfrm>
+            <a:off x="0" y="950434"/>
+            <a:ext cx="10307488" cy="1514686"/>
+          </a:xfrm>
+          <a:prstGeom prst="rect">
+            <a:avLst/>
+          </a:prstGeom>
+        </p:spPr>
+      </p:pic>
+    </p:spTree>
+    <p:extLst>
+      <p:ext uri="{BB962C8B-B14F-4D97-AF65-F5344CB8AC3E}">
+        <p14:creationId xmlns:p14="http://schemas.microsoft.com/office/powerpoint/2010/main" val="347726308"/>
+      </p:ext>
+    </p:extLst>
+  </p:cSld>
+  <p:clrMapOvr>
+    <a:masterClrMapping/>
+  </p:clrMapOvr>
+</p:sld>
+</file>
+
+<file path=ppt/slides/slide47.xml><?xml version="1.0" encoding="utf-8"?>
+<p:sld xmlns:a="http://schemas.openxmlformats.org/drawingml/2006/main" xmlns:r="http://schemas.openxmlformats.org/officeDocument/2006/relationships" xmlns:p="http://schemas.openxmlformats.org/presentationml/2006/main">
+  <p:cSld>
+    <p:spTree>
+      <p:nvGrpSpPr>
+        <p:cNvPr id="1" name=""/>
+        <p:cNvGrpSpPr/>
+        <p:nvPr/>
+      </p:nvGrpSpPr>
+      <p:grpSpPr>
+        <a:xfrm>
+          <a:off x="0" y="0"/>
+          <a:ext cx="0" cy="0"/>
+          <a:chOff x="0" y="0"/>
+          <a:chExt cx="0" cy="0"/>
+        </a:xfrm>
+      </p:grpSpPr>
+      <p:sp>
+        <p:nvSpPr>
+          <p:cNvPr id="3" name="Content Placeholder 2">
+            <a:extLst>
+              <a:ext uri="{FF2B5EF4-FFF2-40B4-BE49-F238E27FC236}">
+                <a16:creationId xmlns:a16="http://schemas.microsoft.com/office/drawing/2014/main" id="{47ADA7B0-A91F-40A5-8FFA-D60ABB385274}"/>
+              </a:ext>
+            </a:extLst>
+          </p:cNvPr>
+          <p:cNvSpPr>
+            <a:spLocks noGrp="1"/>
+          </p:cNvSpPr>
+          <p:nvPr>
+            <p:ph idx="1"/>
+          </p:nvPr>
+        </p:nvSpPr>
+        <p:spPr>
+          <a:xfrm>
+            <a:off x="8360" y="1"/>
+            <a:ext cx="12309146" cy="1013012"/>
+          </a:xfrm>
+        </p:spPr>
+        <p:txBody>
+          <a:bodyPr/>
+          <a:lstStyle/>
+          <a:p>
+            <a:endParaRPr lang="en-US" dirty="0"/>
+          </a:p>
+        </p:txBody>
+      </p:sp>
+      <p:pic>
+        <p:nvPicPr>
+          <p:cNvPr id="5" name="Picture 4">
+            <a:extLst>
+              <a:ext uri="{FF2B5EF4-FFF2-40B4-BE49-F238E27FC236}">
+                <a16:creationId xmlns:a16="http://schemas.microsoft.com/office/drawing/2014/main" id="{4253C235-4BC0-4A1F-814E-C608C61136B9}"/>
+              </a:ext>
+            </a:extLst>
+          </p:cNvPr>
+          <p:cNvPicPr>
+            <a:picLocks noChangeAspect="1"/>
+          </p:cNvPicPr>
+          <p:nvPr/>
+        </p:nvPicPr>
+        <p:blipFill>
+          <a:blip r:embed="rId2"/>
+          <a:stretch>
+            <a:fillRect/>
+          </a:stretch>
+        </p:blipFill>
+        <p:spPr>
+          <a:xfrm>
+            <a:off x="419787" y="899759"/>
+            <a:ext cx="10240804" cy="5058481"/>
+          </a:xfrm>
+          <a:prstGeom prst="rect">
+            <a:avLst/>
+          </a:prstGeom>
+        </p:spPr>
+      </p:pic>
+      <p:pic>
+        <p:nvPicPr>
+          <p:cNvPr id="7" name="Picture 6">
+            <a:extLst>
+              <a:ext uri="{FF2B5EF4-FFF2-40B4-BE49-F238E27FC236}">
+                <a16:creationId xmlns:a16="http://schemas.microsoft.com/office/drawing/2014/main" id="{6F7E3666-9086-4D87-BE4F-1C70169757EA}"/>
+              </a:ext>
+            </a:extLst>
+          </p:cNvPr>
+          <p:cNvPicPr>
+            <a:picLocks noChangeAspect="1"/>
+          </p:cNvPicPr>
+          <p:nvPr/>
+        </p:nvPicPr>
+        <p:blipFill>
+          <a:blip r:embed="rId3"/>
+          <a:stretch>
+            <a:fillRect/>
+          </a:stretch>
+        </p:blipFill>
+        <p:spPr>
+          <a:xfrm>
+            <a:off x="419787" y="5958240"/>
+            <a:ext cx="9774014" cy="657317"/>
+          </a:xfrm>
+          <a:prstGeom prst="rect">
+            <a:avLst/>
+          </a:prstGeom>
+        </p:spPr>
+      </p:pic>
+    </p:spTree>
+    <p:extLst>
+      <p:ext uri="{BB962C8B-B14F-4D97-AF65-F5344CB8AC3E}">
+        <p14:creationId xmlns:p14="http://schemas.microsoft.com/office/powerpoint/2010/main" val="2740152575"/>
+      </p:ext>
+    </p:extLst>
+  </p:cSld>
+  <p:clrMapOvr>
+    <a:masterClrMapping/>
+  </p:clrMapOvr>
+</p:sld>
+</file>
+
+<file path=ppt/slides/slide48.xml><?xml version="1.0" encoding="utf-8"?>
+<p:sld xmlns:a="http://schemas.openxmlformats.org/drawingml/2006/main" xmlns:r="http://schemas.openxmlformats.org/officeDocument/2006/relationships" xmlns:p="http://schemas.openxmlformats.org/presentationml/2006/main">
+  <p:cSld>
+    <p:spTree>
+      <p:nvGrpSpPr>
+        <p:cNvPr id="1" name=""/>
+        <p:cNvGrpSpPr/>
+        <p:nvPr/>
+      </p:nvGrpSpPr>
+      <p:grpSpPr>
+        <a:xfrm>
+          <a:off x="0" y="0"/>
+          <a:ext cx="0" cy="0"/>
+          <a:chOff x="0" y="0"/>
+          <a:chExt cx="0" cy="0"/>
+        </a:xfrm>
+      </p:grpSpPr>
+      <p:sp>
+        <p:nvSpPr>
+          <p:cNvPr id="3" name="Content Placeholder 2">
+            <a:extLst>
+              <a:ext uri="{FF2B5EF4-FFF2-40B4-BE49-F238E27FC236}">
+                <a16:creationId xmlns:a16="http://schemas.microsoft.com/office/drawing/2014/main" id="{76B9095A-B0F6-4166-B7E0-DA3F3E8CC84E}"/>
+              </a:ext>
+            </a:extLst>
+          </p:cNvPr>
+          <p:cNvSpPr>
+            <a:spLocks noGrp="1"/>
+          </p:cNvSpPr>
+          <p:nvPr>
+            <p:ph idx="1"/>
+          </p:nvPr>
+        </p:nvSpPr>
+        <p:spPr>
+          <a:xfrm>
+            <a:off x="0" y="0"/>
+            <a:ext cx="10353762" cy="4058751"/>
+          </a:xfrm>
+        </p:spPr>
+        <p:txBody>
+          <a:bodyPr/>
+          <a:lstStyle/>
+          <a:p>
+            <a:endParaRPr lang="en-US"/>
+          </a:p>
+        </p:txBody>
+      </p:sp>
+      <p:pic>
+        <p:nvPicPr>
+          <p:cNvPr id="5" name="Picture 4">
+            <a:extLst>
+              <a:ext uri="{FF2B5EF4-FFF2-40B4-BE49-F238E27FC236}">
+                <a16:creationId xmlns:a16="http://schemas.microsoft.com/office/drawing/2014/main" id="{F607A159-6FB8-4C25-8C4D-C13E156BEF87}"/>
+              </a:ext>
+            </a:extLst>
+          </p:cNvPr>
+          <p:cNvPicPr>
+            <a:picLocks noChangeAspect="1"/>
+          </p:cNvPicPr>
+          <p:nvPr/>
+        </p:nvPicPr>
+        <p:blipFill>
+          <a:blip r:embed="rId2"/>
+          <a:stretch>
+            <a:fillRect/>
+          </a:stretch>
+        </p:blipFill>
+        <p:spPr>
+          <a:xfrm>
+            <a:off x="0" y="1118021"/>
+            <a:ext cx="12192000" cy="5392922"/>
+          </a:xfrm>
+          <a:prstGeom prst="rect">
+            <a:avLst/>
+          </a:prstGeom>
+        </p:spPr>
+      </p:pic>
+    </p:spTree>
+    <p:extLst>
+      <p:ext uri="{BB962C8B-B14F-4D97-AF65-F5344CB8AC3E}">
+        <p14:creationId xmlns:p14="http://schemas.microsoft.com/office/powerpoint/2010/main" val="605335907"/>
+      </p:ext>
+    </p:extLst>
+  </p:cSld>
+  <p:clrMapOvr>
+    <a:masterClrMapping/>
+  </p:clrMapOvr>
+</p:sld>
+</file>
+
+<file path=ppt/slides/slide49.xml><?xml version="1.0" encoding="utf-8"?>
+<p:sld xmlns:a="http://schemas.openxmlformats.org/drawingml/2006/main" xmlns:r="http://schemas.openxmlformats.org/officeDocument/2006/relationships" xmlns:p="http://schemas.openxmlformats.org/presentationml/2006/main">
+  <p:cSld>
+    <p:spTree>
+      <p:nvGrpSpPr>
+        <p:cNvPr id="1" name=""/>
+        <p:cNvGrpSpPr/>
+        <p:nvPr/>
+      </p:nvGrpSpPr>
+      <p:grpSpPr>
+        <a:xfrm>
+          <a:off x="0" y="0"/>
+          <a:ext cx="0" cy="0"/>
+          <a:chOff x="0" y="0"/>
+          <a:chExt cx="0" cy="0"/>
+        </a:xfrm>
+      </p:grpSpPr>
+      <p:sp>
+        <p:nvSpPr>
+          <p:cNvPr id="3" name="Content Placeholder 2">
+            <a:extLst>
+              <a:ext uri="{FF2B5EF4-FFF2-40B4-BE49-F238E27FC236}">
+                <a16:creationId xmlns:a16="http://schemas.microsoft.com/office/drawing/2014/main" id="{C4C11F81-32BE-4063-83DA-BF57A2BD76AE}"/>
+              </a:ext>
+            </a:extLst>
+          </p:cNvPr>
+          <p:cNvSpPr>
+            <a:spLocks noGrp="1"/>
+          </p:cNvSpPr>
+          <p:nvPr>
+            <p:ph idx="1"/>
+          </p:nvPr>
+        </p:nvSpPr>
+        <p:spPr>
+          <a:xfrm>
+            <a:off x="0" y="0"/>
+            <a:ext cx="10353762" cy="4058751"/>
+          </a:xfrm>
+        </p:spPr>
+        <p:txBody>
+          <a:bodyPr/>
+          <a:lstStyle/>
+          <a:p>
+            <a:endParaRPr lang="en-US" dirty="0"/>
+          </a:p>
+        </p:txBody>
+      </p:sp>
+      <p:pic>
+        <p:nvPicPr>
+          <p:cNvPr id="5" name="Picture 4">
+            <a:extLst>
+              <a:ext uri="{FF2B5EF4-FFF2-40B4-BE49-F238E27FC236}">
+                <a16:creationId xmlns:a16="http://schemas.microsoft.com/office/drawing/2014/main" id="{D813549A-1840-4C94-9A77-CEE2CADF8BE3}"/>
+              </a:ext>
+            </a:extLst>
+          </p:cNvPr>
+          <p:cNvPicPr>
+            <a:picLocks noChangeAspect="1"/>
+          </p:cNvPicPr>
+          <p:nvPr/>
+        </p:nvPicPr>
+        <p:blipFill>
+          <a:blip r:embed="rId2"/>
+          <a:stretch>
+            <a:fillRect/>
+          </a:stretch>
+        </p:blipFill>
+        <p:spPr>
+          <a:xfrm>
+            <a:off x="98612" y="2096160"/>
+            <a:ext cx="12192000" cy="4548268"/>
+          </a:xfrm>
+          <a:prstGeom prst="rect">
+            <a:avLst/>
+          </a:prstGeom>
+        </p:spPr>
+      </p:pic>
+    </p:spTree>
+    <p:extLst>
+      <p:ext uri="{BB962C8B-B14F-4D97-AF65-F5344CB8AC3E}">
+        <p14:creationId xmlns:p14="http://schemas.microsoft.com/office/powerpoint/2010/main" val="801788586"/>
       </p:ext>
     </p:extLst>
   </p:cSld>
@@ -24464,6 +26349,96 @@
     <p:extLst>
       <p:ext uri="{BB962C8B-B14F-4D97-AF65-F5344CB8AC3E}">
         <p14:creationId xmlns:p14="http://schemas.microsoft.com/office/powerpoint/2010/main" val="2237551743"/>
+      </p:ext>
+    </p:extLst>
+  </p:cSld>
+  <p:clrMapOvr>
+    <a:masterClrMapping/>
+  </p:clrMapOvr>
+</p:sld>
+</file>
+
+<file path=ppt/slides/slide50.xml><?xml version="1.0" encoding="utf-8"?>
+<p:sld xmlns:a="http://schemas.openxmlformats.org/drawingml/2006/main" xmlns:r="http://schemas.openxmlformats.org/officeDocument/2006/relationships" xmlns:p="http://schemas.openxmlformats.org/presentationml/2006/main">
+  <p:cSld>
+    <p:spTree>
+      <p:nvGrpSpPr>
+        <p:cNvPr id="1" name=""/>
+        <p:cNvGrpSpPr/>
+        <p:nvPr/>
+      </p:nvGrpSpPr>
+      <p:grpSpPr>
+        <a:xfrm>
+          <a:off x="0" y="0"/>
+          <a:ext cx="0" cy="0"/>
+          <a:chOff x="0" y="0"/>
+          <a:chExt cx="0" cy="0"/>
+        </a:xfrm>
+      </p:grpSpPr>
+      <p:sp>
+        <p:nvSpPr>
+          <p:cNvPr id="3" name="Content Placeholder 2">
+            <a:extLst>
+              <a:ext uri="{FF2B5EF4-FFF2-40B4-BE49-F238E27FC236}">
+                <a16:creationId xmlns:a16="http://schemas.microsoft.com/office/drawing/2014/main" id="{F3871C78-64AA-487F-AE75-5360641A9AFA}"/>
+              </a:ext>
+            </a:extLst>
+          </p:cNvPr>
+          <p:cNvSpPr>
+            <a:spLocks noGrp="1"/>
+          </p:cNvSpPr>
+          <p:nvPr>
+            <p:ph idx="1"/>
+          </p:nvPr>
+        </p:nvSpPr>
+        <p:spPr>
+          <a:xfrm>
+            <a:off x="0" y="0"/>
+            <a:ext cx="12093388" cy="1766047"/>
+          </a:xfrm>
+        </p:spPr>
+        <p:txBody>
+          <a:bodyPr/>
+          <a:lstStyle/>
+          <a:p>
+            <a:endParaRPr lang="en-US" dirty="0"/>
+          </a:p>
+        </p:txBody>
+      </p:sp>
+      <p:pic>
+        <p:nvPicPr>
+          <p:cNvPr id="5" name="Picture 4">
+            <a:extLst>
+              <a:ext uri="{FF2B5EF4-FFF2-40B4-BE49-F238E27FC236}">
+                <a16:creationId xmlns:a16="http://schemas.microsoft.com/office/drawing/2014/main" id="{D38B2217-77D1-433A-99F5-3C6E8B2B3DDC}"/>
+              </a:ext>
+            </a:extLst>
+          </p:cNvPr>
+          <p:cNvPicPr>
+            <a:picLocks noChangeAspect="1"/>
+          </p:cNvPicPr>
+          <p:nvPr/>
+        </p:nvPicPr>
+        <p:blipFill>
+          <a:blip r:embed="rId2"/>
+          <a:stretch>
+            <a:fillRect/>
+          </a:stretch>
+        </p:blipFill>
+        <p:spPr>
+          <a:xfrm>
+            <a:off x="0" y="1876104"/>
+            <a:ext cx="12192000" cy="4791157"/>
+          </a:xfrm>
+          <a:prstGeom prst="rect">
+            <a:avLst/>
+          </a:prstGeom>
+        </p:spPr>
+      </p:pic>
+    </p:spTree>
+    <p:extLst>
+      <p:ext uri="{BB962C8B-B14F-4D97-AF65-F5344CB8AC3E}">
+        <p14:creationId xmlns:p14="http://schemas.microsoft.com/office/powerpoint/2010/main" val="2787786407"/>
       </p:ext>
     </p:extLst>
   </p:cSld>
